--- a/slides/Lesson 4 - Embeddings and Semantic Search.pptx
+++ b/slides/Lesson 4 - Embeddings and Semantic Search.pptx
@@ -10626,7 +10626,7 @@
                 </a:solidFill>
                 <a:latin typeface="Poppins SemiBold"/>
               </a:rPr>
-              <a:t>Your model uses 384 numbers per piece of text - 384 axes it worked out itself.</a:t>
+              <a:t>Your model uses 1,536 numbers per piece of text - 1,536 axes it worked out itself.</a:t>
             </a:r>
           </a:p>
           <a:p>
@@ -11109,7 +11109,7 @@
                 </a:solidFill>
                 <a:latin typeface="Poppins ExtraBold"/>
               </a:rPr>
-              <a:t>No shared alphabet</a:t>
+              <a:t>Not across languages</a:t>
             </a:r>
           </a:p>
         </p:txBody>
@@ -11144,7 +11144,7 @@
                 </a:solidFill>
                 <a:latin typeface="Poppins"/>
               </a:rPr>
-              <a:t>An Armenian question finds the English answer. Not one character in common.</a:t>
+              <a:t>An Armenian question scores an unrelated English line above its answer. Measure, never assume.</a:t>
             </a:r>
           </a:p>
         </p:txBody>
